--- a/poster_upt.pptx
+++ b/poster_upt.pptx
@@ -262,7 +262,7 @@
           <a:lstStyle/>
           <a:p>
             <a:fld id="{A7402507-E8A2-A144-8982-33D991F6B51E}" type="datetimeFigureOut">
-              <a:t>5/4/26</a:t>
+              <a:t>13/4/26</a:t>
             </a:fld>
             <a:endParaRPr lang="en-VN"/>
           </a:p>
@@ -460,7 +460,7 @@
           <a:lstStyle/>
           <a:p>
             <a:fld id="{A7402507-E8A2-A144-8982-33D991F6B51E}" type="datetimeFigureOut">
-              <a:t>5/4/26</a:t>
+              <a:t>13/4/26</a:t>
             </a:fld>
             <a:endParaRPr lang="en-VN"/>
           </a:p>
@@ -668,7 +668,7 @@
           <a:lstStyle/>
           <a:p>
             <a:fld id="{A7402507-E8A2-A144-8982-33D991F6B51E}" type="datetimeFigureOut">
-              <a:t>5/4/26</a:t>
+              <a:t>13/4/26</a:t>
             </a:fld>
             <a:endParaRPr lang="en-VN"/>
           </a:p>
@@ -866,7 +866,7 @@
           <a:lstStyle/>
           <a:p>
             <a:fld id="{A7402507-E8A2-A144-8982-33D991F6B51E}" type="datetimeFigureOut">
-              <a:t>5/4/26</a:t>
+              <a:t>13/4/26</a:t>
             </a:fld>
             <a:endParaRPr lang="en-VN"/>
           </a:p>
@@ -1140,7 +1140,7 @@
           <a:lstStyle/>
           <a:p>
             <a:fld id="{A7402507-E8A2-A144-8982-33D991F6B51E}" type="datetimeFigureOut">
-              <a:t>5/4/26</a:t>
+              <a:t>13/4/26</a:t>
             </a:fld>
             <a:endParaRPr lang="en-VN"/>
           </a:p>
@@ -1406,7 +1406,7 @@
           <a:lstStyle/>
           <a:p>
             <a:fld id="{A7402507-E8A2-A144-8982-33D991F6B51E}" type="datetimeFigureOut">
-              <a:t>5/4/26</a:t>
+              <a:t>13/4/26</a:t>
             </a:fld>
             <a:endParaRPr lang="en-VN"/>
           </a:p>
@@ -1819,7 +1819,7 @@
           <a:lstStyle/>
           <a:p>
             <a:fld id="{A7402507-E8A2-A144-8982-33D991F6B51E}" type="datetimeFigureOut">
-              <a:t>5/4/26</a:t>
+              <a:t>13/4/26</a:t>
             </a:fld>
             <a:endParaRPr lang="en-VN"/>
           </a:p>
@@ -1959,7 +1959,7 @@
           <a:lstStyle/>
           <a:p>
             <a:fld id="{A7402507-E8A2-A144-8982-33D991F6B51E}" type="datetimeFigureOut">
-              <a:t>5/4/26</a:t>
+              <a:t>13/4/26</a:t>
             </a:fld>
             <a:endParaRPr lang="en-VN"/>
           </a:p>
@@ -2070,7 +2070,7 @@
           <a:lstStyle/>
           <a:p>
             <a:fld id="{A7402507-E8A2-A144-8982-33D991F6B51E}" type="datetimeFigureOut">
-              <a:t>5/4/26</a:t>
+              <a:t>13/4/26</a:t>
             </a:fld>
             <a:endParaRPr lang="en-VN"/>
           </a:p>
@@ -2381,7 +2381,7 @@
           <a:lstStyle/>
           <a:p>
             <a:fld id="{A7402507-E8A2-A144-8982-33D991F6B51E}" type="datetimeFigureOut">
-              <a:t>5/4/26</a:t>
+              <a:t>13/4/26</a:t>
             </a:fld>
             <a:endParaRPr lang="en-VN"/>
           </a:p>
@@ -2668,7 +2668,7 @@
           <a:lstStyle/>
           <a:p>
             <a:fld id="{A7402507-E8A2-A144-8982-33D991F6B51E}" type="datetimeFigureOut">
-              <a:t>5/4/26</a:t>
+              <a:t>13/4/26</a:t>
             </a:fld>
             <a:endParaRPr lang="en-VN"/>
           </a:p>
@@ -2909,7 +2909,7 @@
           </a:lstStyle>
           <a:p>
             <a:fld id="{A7402507-E8A2-A144-8982-33D991F6B51E}" type="datetimeFigureOut">
-              <a:t>5/4/26</a:t>
+              <a:t>13/4/26</a:t>
             </a:fld>
             <a:endParaRPr lang="en-VN"/>
           </a:p>
@@ -3521,297 +3521,6 @@
       </p:sp>
       <p:sp>
         <p:nvSpPr>
-          <p:cNvPr id="6" name="Rounded Rectangle 5">
-            <a:extLst>
-              <a:ext uri="{FF2B5EF4-FFF2-40B4-BE49-F238E27FC236}">
-                <a16:creationId xmlns:a16="http://schemas.microsoft.com/office/drawing/2014/main" id="{3F4C3CC4-3F97-2762-88B3-8A0AD41D3B8F}"/>
-              </a:ext>
-            </a:extLst>
-          </p:cNvPr>
-          <p:cNvSpPr>
-            <a:spLocks/>
-          </p:cNvSpPr>
-          <p:nvPr/>
-        </p:nvSpPr>
-        <p:spPr>
-          <a:xfrm>
-            <a:off x="392151" y="315457"/>
-            <a:ext cx="3786198" cy="490655"/>
-          </a:xfrm>
-          <a:prstGeom prst="roundRect">
-            <a:avLst>
-              <a:gd name="adj" fmla="val 42424"/>
-            </a:avLst>
-          </a:prstGeom>
-          <a:solidFill>
-            <a:schemeClr val="bg1"/>
-          </a:solidFill>
-          <a:ln>
-            <a:noFill/>
-          </a:ln>
-        </p:spPr>
-        <p:style>
-          <a:lnRef idx="2">
-            <a:schemeClr val="accent1">
-              <a:shade val="15000"/>
-            </a:schemeClr>
-          </a:lnRef>
-          <a:fillRef idx="1">
-            <a:schemeClr val="accent1"/>
-          </a:fillRef>
-          <a:effectRef idx="0">
-            <a:schemeClr val="accent1"/>
-          </a:effectRef>
-          <a:fontRef idx="minor">
-            <a:schemeClr val="lt1"/>
-          </a:fontRef>
-        </p:style>
-        <p:txBody>
-          <a:bodyPr rtlCol="0" anchor="ctr"/>
-          <a:lstStyle/>
-          <a:p>
-            <a:pPr algn="ctr"/>
-            <a:endParaRPr lang="en-VN"/>
-          </a:p>
-        </p:txBody>
-      </p:sp>
-      <p:pic>
-        <p:nvPicPr>
-          <p:cNvPr id="1028" name="Picture 4">
-            <a:extLst>
-              <a:ext uri="{FF2B5EF4-FFF2-40B4-BE49-F238E27FC236}">
-                <a16:creationId xmlns:a16="http://schemas.microsoft.com/office/drawing/2014/main" id="{F5CCE88B-BFC6-788D-14D5-BAD390136F0E}"/>
-              </a:ext>
-            </a:extLst>
-          </p:cNvPr>
-          <p:cNvPicPr>
-            <a:picLocks noChangeAspect="1"/>
-          </p:cNvPicPr>
-          <p:nvPr/>
-        </p:nvPicPr>
-        <p:blipFill>
-          <a:blip r:embed="rId2">
-            <a:extLst>
-              <a:ext uri="{28A0092B-C50C-407E-A947-70E740481C1C}">
-                <a14:useLocalDpi xmlns:a14="http://schemas.microsoft.com/office/drawing/2010/main" val="0"/>
-              </a:ext>
-            </a:extLst>
-          </a:blip>
-          <a:srcRect/>
-          <a:stretch>
-            <a:fillRect/>
-          </a:stretch>
-        </p:blipFill>
-        <p:spPr bwMode="auto">
-          <a:xfrm>
-            <a:off x="1910143" y="234795"/>
-            <a:ext cx="1134505" cy="556321"/>
-          </a:xfrm>
-          <a:prstGeom prst="rect">
-            <a:avLst/>
-          </a:prstGeom>
-          <a:noFill/>
-          <a:extLst>
-            <a:ext uri="{909E8E84-426E-40DD-AFC4-6F175D3DCCD1}">
-              <a14:hiddenFill xmlns:a14="http://schemas.microsoft.com/office/drawing/2010/main">
-                <a:solidFill>
-                  <a:srgbClr val="FFFFFF"/>
-                </a:solidFill>
-              </a14:hiddenFill>
-            </a:ext>
-          </a:extLst>
-        </p:spPr>
-      </p:pic>
-      <p:pic>
-        <p:nvPicPr>
-          <p:cNvPr id="1030" name="Picture 6" descr="LOGO TRƯỜNG - Trường Đại học Phan Thiết">
-            <a:extLst>
-              <a:ext uri="{FF2B5EF4-FFF2-40B4-BE49-F238E27FC236}">
-                <a16:creationId xmlns:a16="http://schemas.microsoft.com/office/drawing/2014/main" id="{CDE9C993-47C0-402D-6199-3E8243FEF645}"/>
-              </a:ext>
-            </a:extLst>
-          </p:cNvPr>
-          <p:cNvPicPr>
-            <a:picLocks noChangeAspect="1"/>
-          </p:cNvPicPr>
-          <p:nvPr/>
-        </p:nvPicPr>
-        <p:blipFill>
-          <a:blip r:embed="rId3">
-            <a:extLst>
-              <a:ext uri="{28A0092B-C50C-407E-A947-70E740481C1C}">
-                <a14:useLocalDpi xmlns:a14="http://schemas.microsoft.com/office/drawing/2010/main" val="0"/>
-              </a:ext>
-            </a:extLst>
-          </a:blip>
-          <a:srcRect/>
-          <a:stretch>
-            <a:fillRect/>
-          </a:stretch>
-        </p:blipFill>
-        <p:spPr bwMode="auto">
-          <a:xfrm>
-            <a:off x="431348" y="365981"/>
-            <a:ext cx="400115" cy="400115"/>
-          </a:xfrm>
-          <a:prstGeom prst="rect">
-            <a:avLst/>
-          </a:prstGeom>
-          <a:noFill/>
-          <a:extLst>
-            <a:ext uri="{909E8E84-426E-40DD-AFC4-6F175D3DCCD1}">
-              <a14:hiddenFill xmlns:a14="http://schemas.microsoft.com/office/drawing/2010/main">
-                <a:solidFill>
-                  <a:srgbClr val="FFFFFF"/>
-                </a:solidFill>
-              </a14:hiddenFill>
-            </a:ext>
-          </a:extLst>
-        </p:spPr>
-      </p:pic>
-      <p:pic>
-        <p:nvPicPr>
-          <p:cNvPr id="1032" name="Picture 8" descr="Giới Thiệu Trường Đại Học Thương Mại - TMU">
-            <a:extLst>
-              <a:ext uri="{FF2B5EF4-FFF2-40B4-BE49-F238E27FC236}">
-                <a16:creationId xmlns:a16="http://schemas.microsoft.com/office/drawing/2014/main" id="{DA07B877-7FF3-DF08-C49F-D4E70F3C55FC}"/>
-              </a:ext>
-            </a:extLst>
-          </p:cNvPr>
-          <p:cNvPicPr>
-            <a:picLocks noChangeAspect="1"/>
-          </p:cNvPicPr>
-          <p:nvPr/>
-        </p:nvPicPr>
-        <p:blipFill>
-          <a:blip r:embed="rId4">
-            <a:extLst>
-              <a:ext uri="{28A0092B-C50C-407E-A947-70E740481C1C}">
-                <a14:useLocalDpi xmlns:a14="http://schemas.microsoft.com/office/drawing/2010/main" val="0"/>
-              </a:ext>
-            </a:extLst>
-          </a:blip>
-          <a:srcRect/>
-          <a:stretch>
-            <a:fillRect/>
-          </a:stretch>
-        </p:blipFill>
-        <p:spPr bwMode="auto">
-          <a:xfrm>
-            <a:off x="882279" y="360726"/>
-            <a:ext cx="649073" cy="397561"/>
-          </a:xfrm>
-          <a:prstGeom prst="rect">
-            <a:avLst/>
-          </a:prstGeom>
-          <a:noFill/>
-          <a:extLst>
-            <a:ext uri="{909E8E84-426E-40DD-AFC4-6F175D3DCCD1}">
-              <a14:hiddenFill xmlns:a14="http://schemas.microsoft.com/office/drawing/2010/main">
-                <a:solidFill>
-                  <a:srgbClr val="FFFFFF"/>
-                </a:solidFill>
-              </a14:hiddenFill>
-            </a:ext>
-          </a:extLst>
-        </p:spPr>
-      </p:pic>
-      <p:pic>
-        <p:nvPicPr>
-          <p:cNvPr id="1034" name="Picture 10" descr="Logo Phenikaa University - International Institute for Environmental Studies">
-            <a:extLst>
-              <a:ext uri="{FF2B5EF4-FFF2-40B4-BE49-F238E27FC236}">
-                <a16:creationId xmlns:a16="http://schemas.microsoft.com/office/drawing/2014/main" id="{EE290FA9-928B-70B4-837F-DBA542C543CB}"/>
-              </a:ext>
-            </a:extLst>
-          </p:cNvPr>
-          <p:cNvPicPr>
-            <a:picLocks noChangeAspect="1"/>
-          </p:cNvPicPr>
-          <p:nvPr/>
-        </p:nvPicPr>
-        <p:blipFill>
-          <a:blip r:embed="rId5">
-            <a:extLst>
-              <a:ext uri="{28A0092B-C50C-407E-A947-70E740481C1C}">
-                <a14:useLocalDpi xmlns:a14="http://schemas.microsoft.com/office/drawing/2010/main" val="0"/>
-              </a:ext>
-            </a:extLst>
-          </a:blip>
-          <a:srcRect/>
-          <a:stretch>
-            <a:fillRect/>
-          </a:stretch>
-        </p:blipFill>
-        <p:spPr bwMode="auto">
-          <a:xfrm>
-            <a:off x="3055057" y="348147"/>
-            <a:ext cx="608946" cy="417949"/>
-          </a:xfrm>
-          <a:prstGeom prst="rect">
-            <a:avLst/>
-          </a:prstGeom>
-          <a:noFill/>
-          <a:extLst>
-            <a:ext uri="{909E8E84-426E-40DD-AFC4-6F175D3DCCD1}">
-              <a14:hiddenFill xmlns:a14="http://schemas.microsoft.com/office/drawing/2010/main">
-                <a:solidFill>
-                  <a:srgbClr val="FFFFFF"/>
-                </a:solidFill>
-              </a14:hiddenFill>
-            </a:ext>
-          </a:extLst>
-        </p:spPr>
-      </p:pic>
-      <p:pic>
-        <p:nvPicPr>
-          <p:cNvPr id="1036" name="Picture 12" descr="About | Tohoku University">
-            <a:extLst>
-              <a:ext uri="{FF2B5EF4-FFF2-40B4-BE49-F238E27FC236}">
-                <a16:creationId xmlns:a16="http://schemas.microsoft.com/office/drawing/2014/main" id="{E702C1A8-DC90-4A53-8D3D-3928F86A1F76}"/>
-              </a:ext>
-            </a:extLst>
-          </p:cNvPr>
-          <p:cNvPicPr>
-            <a:picLocks noChangeAspect="1"/>
-          </p:cNvPicPr>
-          <p:nvPr/>
-        </p:nvPicPr>
-        <p:blipFill>
-          <a:blip r:embed="rId6">
-            <a:extLst>
-              <a:ext uri="{28A0092B-C50C-407E-A947-70E740481C1C}">
-                <a14:useLocalDpi xmlns:a14="http://schemas.microsoft.com/office/drawing/2010/main" val="0"/>
-              </a:ext>
-            </a:extLst>
-          </a:blip>
-          <a:srcRect/>
-          <a:stretch>
-            <a:fillRect/>
-          </a:stretch>
-        </p:blipFill>
-        <p:spPr bwMode="auto">
-          <a:xfrm>
-            <a:off x="3714205" y="360582"/>
-            <a:ext cx="302791" cy="409473"/>
-          </a:xfrm>
-          <a:prstGeom prst="rect">
-            <a:avLst/>
-          </a:prstGeom>
-          <a:noFill/>
-          <a:extLst>
-            <a:ext uri="{909E8E84-426E-40DD-AFC4-6F175D3DCCD1}">
-              <a14:hiddenFill xmlns:a14="http://schemas.microsoft.com/office/drawing/2010/main">
-                <a:solidFill>
-                  <a:srgbClr val="FFFFFF"/>
-                </a:solidFill>
-              </a14:hiddenFill>
-            </a:ext>
-          </a:extLst>
-        </p:spPr>
-      </p:pic>
-      <p:sp>
-        <p:nvSpPr>
           <p:cNvPr id="7" name="Rounded Rectangle 6">
             <a:extLst>
               <a:ext uri="{FF2B5EF4-FFF2-40B4-BE49-F238E27FC236}">
@@ -4389,10 +4098,10 @@
             </a:pathLst>
           </a:custGeom>
           <a:blipFill>
-            <a:blip r:embed="rId7">
+            <a:blip r:embed="rId2">
               <a:extLst>
                 <a:ext uri="{96DAC541-7B7A-43D3-8B79-37D633B846F1}">
-                  <asvg:svgBlip xmlns:asvg="http://schemas.microsoft.com/office/drawing/2016/SVG/main" r:embed="rId8"/>
+                  <asvg:svgBlip xmlns:asvg="http://schemas.microsoft.com/office/drawing/2016/SVG/main" r:embed="rId3"/>
                 </a:ext>
               </a:extLst>
             </a:blip>
@@ -4412,73 +4121,6 @@
           </a:p>
         </p:txBody>
       </p:sp>
-      <p:sp>
-        <p:nvSpPr>
-          <p:cNvPr id="29" name="Freeform 14">
-            <a:extLst>
-              <a:ext uri="{FF2B5EF4-FFF2-40B4-BE49-F238E27FC236}">
-                <a16:creationId xmlns:a16="http://schemas.microsoft.com/office/drawing/2014/main" id="{1D4B7C81-512E-FF50-B58F-92A638DE1DEC}"/>
-              </a:ext>
-            </a:extLst>
-          </p:cNvPr>
-          <p:cNvSpPr>
-            <a:spLocks noChangeAspect="1"/>
-          </p:cNvSpPr>
-          <p:nvPr/>
-        </p:nvSpPr>
-        <p:spPr>
-          <a:xfrm rot="16200000" flipV="1">
-            <a:off x="4332205" y="325872"/>
-            <a:ext cx="308221" cy="304858"/>
-          </a:xfrm>
-          <a:custGeom>
-            <a:avLst/>
-            <a:gdLst/>
-            <a:ahLst/>
-            <a:cxnLst/>
-            <a:rect l="l" t="t" r="r" b="b"/>
-            <a:pathLst>
-              <a:path w="1246344" h="1232747">
-                <a:moveTo>
-                  <a:pt x="1246344" y="0"/>
-                </a:moveTo>
-                <a:lnTo>
-                  <a:pt x="0" y="0"/>
-                </a:lnTo>
-                <a:lnTo>
-                  <a:pt x="0" y="1232747"/>
-                </a:lnTo>
-                <a:lnTo>
-                  <a:pt x="1246344" y="1232747"/>
-                </a:lnTo>
-                <a:lnTo>
-                  <a:pt x="1246344" y="0"/>
-                </a:lnTo>
-                <a:close/>
-              </a:path>
-            </a:pathLst>
-          </a:custGeom>
-          <a:blipFill>
-            <a:blip r:embed="rId9">
-              <a:extLst>
-                <a:ext uri="{96DAC541-7B7A-43D3-8B79-37D633B846F1}">
-                  <asvg:svgBlip xmlns:asvg="http://schemas.microsoft.com/office/drawing/2016/SVG/main" r:embed="rId10"/>
-                </a:ext>
-              </a:extLst>
-            </a:blip>
-            <a:stretch>
-              <a:fillRect/>
-            </a:stretch>
-          </a:blipFill>
-        </p:spPr>
-        <p:txBody>
-          <a:bodyPr/>
-          <a:lstStyle/>
-          <a:p>
-            <a:endParaRPr lang="en-VN"/>
-          </a:p>
-        </p:txBody>
-      </p:sp>
       <p:pic>
         <p:nvPicPr>
           <p:cNvPr id="31" name="Picture 30" descr="A black background with a black square&#10;&#10;AI-generated content may be incorrect.">
@@ -4494,7 +4136,7 @@
           <p:nvPr/>
         </p:nvPicPr>
         <p:blipFill>
-          <a:blip r:embed="rId11">
+          <a:blip r:embed="rId4">
             <a:lum bright="70000" contrast="-70000"/>
           </a:blip>
           <a:stretch>
@@ -4789,10 +4431,10 @@
           <p:nvPr/>
         </p:nvPicPr>
         <p:blipFill>
-          <a:blip r:embed="rId12">
+          <a:blip r:embed="rId5">
             <a:extLst>
               <a:ext uri="{96DAC541-7B7A-43D3-8B79-37D633B846F1}">
-                <asvg:svgBlip xmlns:asvg="http://schemas.microsoft.com/office/drawing/2016/SVG/main" r:embed="rId13"/>
+                <asvg:svgBlip xmlns:asvg="http://schemas.microsoft.com/office/drawing/2016/SVG/main" r:embed="rId6"/>
               </a:ext>
             </a:extLst>
           </a:blip>
@@ -5238,10 +4880,10 @@
             </a:pathLst>
           </a:custGeom>
           <a:blipFill>
-            <a:blip r:embed="rId9">
+            <a:blip r:embed="rId7">
               <a:extLst>
                 <a:ext uri="{96DAC541-7B7A-43D3-8B79-37D633B846F1}">
-                  <asvg:svgBlip xmlns:asvg="http://schemas.microsoft.com/office/drawing/2016/SVG/main" r:embed="rId10"/>
+                  <asvg:svgBlip xmlns:asvg="http://schemas.microsoft.com/office/drawing/2016/SVG/main" r:embed="rId8"/>
                 </a:ext>
               </a:extLst>
             </a:blip>
@@ -5834,10 +5476,10 @@
           <p:nvPr/>
         </p:nvPicPr>
         <p:blipFill>
-          <a:blip r:embed="rId12">
+          <a:blip r:embed="rId5">
             <a:extLst>
               <a:ext uri="{96DAC541-7B7A-43D3-8B79-37D633B846F1}">
-                <asvg:svgBlip xmlns:asvg="http://schemas.microsoft.com/office/drawing/2016/SVG/main" r:embed="rId13"/>
+                <asvg:svgBlip xmlns:asvg="http://schemas.microsoft.com/office/drawing/2016/SVG/main" r:embed="rId6"/>
               </a:ext>
             </a:extLst>
           </a:blip>
@@ -6255,7 +5897,7 @@
           <p:nvPr/>
         </p:nvPicPr>
         <p:blipFill>
-          <a:blip r:embed="rId11">
+          <a:blip r:embed="rId4">
             <a:lum bright="70000" contrast="-70000"/>
           </a:blip>
           <a:stretch>
@@ -6274,53 +5916,6 @@
       </p:pic>
       <p:pic>
         <p:nvPicPr>
-          <p:cNvPr id="1040" name="Picture 16">
-            <a:extLst>
-              <a:ext uri="{FF2B5EF4-FFF2-40B4-BE49-F238E27FC236}">
-                <a16:creationId xmlns:a16="http://schemas.microsoft.com/office/drawing/2014/main" id="{F12C7638-E0A9-DC5A-C1AA-9E1DAC6E958C}"/>
-              </a:ext>
-            </a:extLst>
-          </p:cNvPr>
-          <p:cNvPicPr>
-            <a:picLocks noChangeAspect="1" noChangeArrowheads="1"/>
-          </p:cNvPicPr>
-          <p:nvPr/>
-        </p:nvPicPr>
-        <p:blipFill rotWithShape="1">
-          <a:blip r:embed="rId14">
-            <a:extLst>
-              <a:ext uri="{28A0092B-C50C-407E-A947-70E740481C1C}">
-                <a14:useLocalDpi xmlns:a14="http://schemas.microsoft.com/office/drawing/2010/main" val="0"/>
-              </a:ext>
-            </a:extLst>
-          </a:blip>
-          <a:srcRect l="61227" t="79869" r="35513" b="13804"/>
-          <a:stretch>
-            <a:fillRect/>
-          </a:stretch>
-        </p:blipFill>
-        <p:spPr bwMode="auto">
-          <a:xfrm>
-            <a:off x="1589614" y="368083"/>
-            <a:ext cx="400115" cy="436868"/>
-          </a:xfrm>
-          <a:prstGeom prst="rect">
-            <a:avLst/>
-          </a:prstGeom>
-          <a:noFill/>
-          <a:extLst>
-            <a:ext uri="{909E8E84-426E-40DD-AFC4-6F175D3DCCD1}">
-              <a14:hiddenFill xmlns:a14="http://schemas.microsoft.com/office/drawing/2010/main">
-                <a:solidFill>
-                  <a:srgbClr val="FFFFFF"/>
-                </a:solidFill>
-              </a14:hiddenFill>
-            </a:ext>
-          </a:extLst>
-        </p:spPr>
-      </p:pic>
-      <p:pic>
-        <p:nvPicPr>
           <p:cNvPr id="1045" name="Picture 1044" descr="A qr code on a white background&#10;&#10;AI-generated content may be incorrect.">
             <a:extLst>
               <a:ext uri="{FF2B5EF4-FFF2-40B4-BE49-F238E27FC236}">
@@ -6334,7 +5929,7 @@
           <p:nvPr/>
         </p:nvPicPr>
         <p:blipFill>
-          <a:blip r:embed="rId15"/>
+          <a:blip r:embed="rId9"/>
           <a:srcRect l="8672" t="9171" r="8088" b="9178"/>
           <a:stretch>
             <a:fillRect/>
@@ -6365,7 +5960,7 @@
           <p:nvPr/>
         </p:nvPicPr>
         <p:blipFill>
-          <a:blip r:embed="rId15"/>
+          <a:blip r:embed="rId9"/>
           <a:srcRect l="8672" t="9171" r="8088" b="9178"/>
           <a:stretch>
             <a:fillRect/>
@@ -6487,10 +6082,10 @@
       </p:sp>
       <p:sp>
         <p:nvSpPr>
-          <p:cNvPr id="1056" name="Rounded Rectangle 1055">
-            <a:extLst>
-              <a:ext uri="{FF2B5EF4-FFF2-40B4-BE49-F238E27FC236}">
-                <a16:creationId xmlns:a16="http://schemas.microsoft.com/office/drawing/2014/main" id="{3D9DFACE-0DE4-4E80-5987-0AC9A111F627}"/>
+          <p:cNvPr id="27" name="Rounded Rectangle 26">
+            <a:extLst>
+              <a:ext uri="{FF2B5EF4-FFF2-40B4-BE49-F238E27FC236}">
+                <a16:creationId xmlns:a16="http://schemas.microsoft.com/office/drawing/2014/main" id="{242470F0-3215-085E-DCFE-7D1D8F882F29}"/>
               </a:ext>
             </a:extLst>
           </p:cNvPr>
@@ -6501,35 +6096,28 @@
         </p:nvSpPr>
         <p:spPr>
           <a:xfrm>
-            <a:off x="5163761" y="317559"/>
-            <a:ext cx="3786198" cy="490655"/>
+            <a:off x="392150" y="315457"/>
+            <a:ext cx="3990664" cy="490655"/>
           </a:xfrm>
           <a:prstGeom prst="roundRect">
             <a:avLst>
               <a:gd name="adj" fmla="val 42424"/>
             </a:avLst>
           </a:prstGeom>
-          <a:solidFill>
-            <a:schemeClr val="bg1"/>
-          </a:solidFill>
-          <a:ln>
-            <a:noFill/>
-          </a:ln>
+          <a:ln/>
         </p:spPr>
         <p:style>
           <a:lnRef idx="2">
-            <a:schemeClr val="accent1">
-              <a:shade val="15000"/>
-            </a:schemeClr>
+            <a:schemeClr val="dk1"/>
           </a:lnRef>
           <a:fillRef idx="1">
-            <a:schemeClr val="accent1"/>
+            <a:schemeClr val="lt1"/>
           </a:fillRef>
           <a:effectRef idx="0">
-            <a:schemeClr val="accent1"/>
+            <a:schemeClr val="dk1"/>
           </a:effectRef>
           <a:fontRef idx="minor">
-            <a:schemeClr val="lt1"/>
+            <a:schemeClr val="dk1"/>
           </a:fontRef>
         </p:style>
         <p:txBody>
@@ -6543,10 +6131,57 @@
       </p:sp>
       <p:pic>
         <p:nvPicPr>
-          <p:cNvPr id="1057" name="Picture 4">
-            <a:extLst>
-              <a:ext uri="{FF2B5EF4-FFF2-40B4-BE49-F238E27FC236}">
-                <a16:creationId xmlns:a16="http://schemas.microsoft.com/office/drawing/2014/main" id="{652C9490-1D66-DAD4-A1BB-F2CAA01DC75E}"/>
+          <p:cNvPr id="28" name="Picture 4">
+            <a:extLst>
+              <a:ext uri="{FF2B5EF4-FFF2-40B4-BE49-F238E27FC236}">
+                <a16:creationId xmlns:a16="http://schemas.microsoft.com/office/drawing/2014/main" id="{04E3119B-42BE-F9A2-9BCD-1FF8840E6E46}"/>
+              </a:ext>
+            </a:extLst>
+          </p:cNvPr>
+          <p:cNvPicPr>
+            <a:picLocks noChangeAspect="1"/>
+          </p:cNvPicPr>
+          <p:nvPr/>
+        </p:nvPicPr>
+        <p:blipFill rotWithShape="1">
+          <a:blip r:embed="rId10">
+            <a:extLst>
+              <a:ext uri="{28A0092B-C50C-407E-A947-70E740481C1C}">
+                <a14:useLocalDpi xmlns:a14="http://schemas.microsoft.com/office/drawing/2010/main" val="0"/>
+              </a:ext>
+            </a:extLst>
+          </a:blip>
+          <a:srcRect t="22610"/>
+          <a:stretch>
+            <a:fillRect/>
+          </a:stretch>
+        </p:blipFill>
+        <p:spPr bwMode="auto">
+          <a:xfrm>
+            <a:off x="1514726" y="373655"/>
+            <a:ext cx="1138372" cy="432000"/>
+          </a:xfrm>
+          <a:prstGeom prst="rect">
+            <a:avLst/>
+          </a:prstGeom>
+          <a:noFill/>
+          <a:extLst>
+            <a:ext uri="{909E8E84-426E-40DD-AFC4-6F175D3DCCD1}">
+              <a14:hiddenFill xmlns:a14="http://schemas.microsoft.com/office/drawing/2010/main">
+                <a:solidFill>
+                  <a:srgbClr val="FFFFFF"/>
+                </a:solidFill>
+              </a14:hiddenFill>
+            </a:ext>
+          </a:extLst>
+        </p:spPr>
+      </p:pic>
+      <p:pic>
+        <p:nvPicPr>
+          <p:cNvPr id="30" name="Picture 6" descr="LOGO TRƯỜNG - Trường Đại học Phan Thiết">
+            <a:extLst>
+              <a:ext uri="{FF2B5EF4-FFF2-40B4-BE49-F238E27FC236}">
+                <a16:creationId xmlns:a16="http://schemas.microsoft.com/office/drawing/2014/main" id="{7C03FF4F-749D-44B2-08F5-F2BEE951B058}"/>
               </a:ext>
             </a:extLst>
           </p:cNvPr>
@@ -6556,7 +6191,7 @@
           <p:nvPr/>
         </p:nvPicPr>
         <p:blipFill>
-          <a:blip r:embed="rId2">
+          <a:blip r:embed="rId11">
             <a:extLst>
               <a:ext uri="{28A0092B-C50C-407E-A947-70E740481C1C}">
                 <a14:useLocalDpi xmlns:a14="http://schemas.microsoft.com/office/drawing/2010/main" val="0"/>
@@ -6570,8 +6205,8 @@
         </p:blipFill>
         <p:spPr bwMode="auto">
           <a:xfrm>
-            <a:off x="6681753" y="236897"/>
-            <a:ext cx="1134505" cy="556321"/>
+            <a:off x="461085" y="399179"/>
+            <a:ext cx="324000" cy="324000"/>
           </a:xfrm>
           <a:prstGeom prst="rect">
             <a:avLst/>
@@ -6590,10 +6225,10 @@
       </p:pic>
       <p:pic>
         <p:nvPicPr>
-          <p:cNvPr id="1058" name="Picture 6" descr="LOGO TRƯỜNG - Trường Đại học Phan Thiết">
-            <a:extLst>
-              <a:ext uri="{FF2B5EF4-FFF2-40B4-BE49-F238E27FC236}">
-                <a16:creationId xmlns:a16="http://schemas.microsoft.com/office/drawing/2014/main" id="{63FC44FC-4A9C-5E63-02FC-14DF2FD0D1C5}"/>
+          <p:cNvPr id="35" name="Picture 8" descr="Giới Thiệu Trường Đại Học Thương Mại - TMU">
+            <a:extLst>
+              <a:ext uri="{FF2B5EF4-FFF2-40B4-BE49-F238E27FC236}">
+                <a16:creationId xmlns:a16="http://schemas.microsoft.com/office/drawing/2014/main" id="{FA62FAB6-EA04-F6E4-1B90-E322C2B5D5AD}"/>
               </a:ext>
             </a:extLst>
           </p:cNvPr>
@@ -6603,7 +6238,7 @@
           <p:nvPr/>
         </p:nvPicPr>
         <p:blipFill>
-          <a:blip r:embed="rId3">
+          <a:blip r:embed="rId12">
             <a:extLst>
               <a:ext uri="{28A0092B-C50C-407E-A947-70E740481C1C}">
                 <a14:useLocalDpi xmlns:a14="http://schemas.microsoft.com/office/drawing/2010/main" val="0"/>
@@ -6617,8 +6252,8 @@
         </p:blipFill>
         <p:spPr bwMode="auto">
           <a:xfrm>
-            <a:off x="5202958" y="368083"/>
-            <a:ext cx="400115" cy="400115"/>
+            <a:off x="788713" y="399178"/>
+            <a:ext cx="528973" cy="324000"/>
           </a:xfrm>
           <a:prstGeom prst="rect">
             <a:avLst/>
@@ -6637,10 +6272,10 @@
       </p:pic>
       <p:pic>
         <p:nvPicPr>
-          <p:cNvPr id="1059" name="Picture 8" descr="Giới Thiệu Trường Đại Học Thương Mại - TMU">
-            <a:extLst>
-              <a:ext uri="{FF2B5EF4-FFF2-40B4-BE49-F238E27FC236}">
-                <a16:creationId xmlns:a16="http://schemas.microsoft.com/office/drawing/2014/main" id="{DC47B612-FE08-2B92-148F-9D3CDAF5638C}"/>
+          <p:cNvPr id="36" name="Picture 10" descr="Logo Phenikaa University - International Institute for Environmental Studies">
+            <a:extLst>
+              <a:ext uri="{FF2B5EF4-FFF2-40B4-BE49-F238E27FC236}">
+                <a16:creationId xmlns:a16="http://schemas.microsoft.com/office/drawing/2014/main" id="{4F189D55-89DA-9FC7-0FC7-3DB1F7308291}"/>
               </a:ext>
             </a:extLst>
           </p:cNvPr>
@@ -6650,7 +6285,7 @@
           <p:nvPr/>
         </p:nvPicPr>
         <p:blipFill>
-          <a:blip r:embed="rId4">
+          <a:blip r:embed="rId13">
             <a:extLst>
               <a:ext uri="{28A0092B-C50C-407E-A947-70E740481C1C}">
                 <a14:useLocalDpi xmlns:a14="http://schemas.microsoft.com/office/drawing/2010/main" val="0"/>
@@ -6664,8 +6299,8 @@
         </p:blipFill>
         <p:spPr bwMode="auto">
           <a:xfrm>
-            <a:off x="5653889" y="362828"/>
-            <a:ext cx="649073" cy="397561"/>
+            <a:off x="2610417" y="402365"/>
+            <a:ext cx="472064" cy="324000"/>
           </a:xfrm>
           <a:prstGeom prst="rect">
             <a:avLst/>
@@ -6684,10 +6319,10 @@
       </p:pic>
       <p:pic>
         <p:nvPicPr>
-          <p:cNvPr id="1060" name="Picture 10" descr="Logo Phenikaa University - International Institute for Environmental Studies">
-            <a:extLst>
-              <a:ext uri="{FF2B5EF4-FFF2-40B4-BE49-F238E27FC236}">
-                <a16:creationId xmlns:a16="http://schemas.microsoft.com/office/drawing/2014/main" id="{FC45129C-AF14-5928-3BF5-58880F07DB1D}"/>
+          <p:cNvPr id="38" name="Picture 12" descr="About | Tohoku University">
+            <a:extLst>
+              <a:ext uri="{FF2B5EF4-FFF2-40B4-BE49-F238E27FC236}">
+                <a16:creationId xmlns:a16="http://schemas.microsoft.com/office/drawing/2014/main" id="{8EBAC310-4C91-B179-0FAF-D403223A56E4}"/>
               </a:ext>
             </a:extLst>
           </p:cNvPr>
@@ -6697,7 +6332,7 @@
           <p:nvPr/>
         </p:nvPicPr>
         <p:blipFill>
-          <a:blip r:embed="rId5">
+          <a:blip r:embed="rId14">
             <a:extLst>
               <a:ext uri="{28A0092B-C50C-407E-A947-70E740481C1C}">
                 <a14:useLocalDpi xmlns:a14="http://schemas.microsoft.com/office/drawing/2010/main" val="0"/>
@@ -6711,8 +6346,8 @@
         </p:blipFill>
         <p:spPr bwMode="auto">
           <a:xfrm>
-            <a:off x="7826667" y="350249"/>
-            <a:ext cx="608946" cy="417949"/>
+            <a:off x="4048609" y="384165"/>
+            <a:ext cx="266208" cy="360000"/>
           </a:xfrm>
           <a:prstGeom prst="rect">
             <a:avLst/>
@@ -6731,20 +6366,67 @@
       </p:pic>
       <p:pic>
         <p:nvPicPr>
-          <p:cNvPr id="1061" name="Picture 12" descr="About | Tohoku University">
-            <a:extLst>
-              <a:ext uri="{FF2B5EF4-FFF2-40B4-BE49-F238E27FC236}">
-                <a16:creationId xmlns:a16="http://schemas.microsoft.com/office/drawing/2014/main" id="{E8B2E8C9-1BAC-0994-A59D-38ECE6CD41DE}"/>
+          <p:cNvPr id="40" name="Picture 39">
+            <a:extLst>
+              <a:ext uri="{FF2B5EF4-FFF2-40B4-BE49-F238E27FC236}">
+                <a16:creationId xmlns:a16="http://schemas.microsoft.com/office/drawing/2014/main" id="{06A810B8-94C8-7F10-66E5-C38BAB664B33}"/>
               </a:ext>
             </a:extLst>
           </p:cNvPr>
           <p:cNvPicPr>
-            <a:picLocks noChangeAspect="1"/>
+            <a:picLocks noChangeAspect="1" noChangeArrowheads="1"/>
+          </p:cNvPicPr>
+          <p:nvPr/>
+        </p:nvPicPr>
+        <p:blipFill rotWithShape="1">
+          <a:blip r:embed="rId15">
+            <a:extLst>
+              <a:ext uri="{28A0092B-C50C-407E-A947-70E740481C1C}">
+                <a14:useLocalDpi xmlns:a14="http://schemas.microsoft.com/office/drawing/2010/main" val="0"/>
+              </a:ext>
+            </a:extLst>
+          </a:blip>
+          <a:srcRect l="61575" t="79869" r="35762" b="14847"/>
+          <a:stretch>
+            <a:fillRect/>
+          </a:stretch>
+        </p:blipFill>
+        <p:spPr bwMode="auto">
+          <a:xfrm>
+            <a:off x="1318244" y="386314"/>
+            <a:ext cx="296328" cy="330743"/>
+          </a:xfrm>
+          <a:prstGeom prst="rect">
+            <a:avLst/>
+          </a:prstGeom>
+          <a:noFill/>
+          <a:extLst>
+            <a:ext uri="{909E8E84-426E-40DD-AFC4-6F175D3DCCD1}">
+              <a14:hiddenFill xmlns:a14="http://schemas.microsoft.com/office/drawing/2010/main">
+                <a:solidFill>
+                  <a:srgbClr val="FFFFFF"/>
+                </a:solidFill>
+              </a14:hiddenFill>
+            </a:ext>
+          </a:extLst>
+        </p:spPr>
+      </p:pic>
+      <p:pic>
+        <p:nvPicPr>
+          <p:cNvPr id="41" name="Picture 2" descr="No description available.">
+            <a:extLst>
+              <a:ext uri="{FF2B5EF4-FFF2-40B4-BE49-F238E27FC236}">
+                <a16:creationId xmlns:a16="http://schemas.microsoft.com/office/drawing/2014/main" id="{A2F7B5A1-CCE4-FC84-7DF1-C42AB7A4D2E7}"/>
+              </a:ext>
+            </a:extLst>
+          </p:cNvPr>
+          <p:cNvPicPr>
+            <a:picLocks noChangeAspect="1" noChangeArrowheads="1"/>
           </p:cNvPicPr>
           <p:nvPr/>
         </p:nvPicPr>
         <p:blipFill>
-          <a:blip r:embed="rId6">
+          <a:blip r:embed="rId16">
             <a:extLst>
               <a:ext uri="{28A0092B-C50C-407E-A947-70E740481C1C}">
                 <a14:useLocalDpi xmlns:a14="http://schemas.microsoft.com/office/drawing/2010/main" val="0"/>
@@ -6758,8 +6440,8 @@
         </p:blipFill>
         <p:spPr bwMode="auto">
           <a:xfrm>
-            <a:off x="8485815" y="362684"/>
-            <a:ext cx="302791" cy="409473"/>
+            <a:off x="3616158" y="373655"/>
+            <a:ext cx="373999" cy="360000"/>
           </a:xfrm>
           <a:prstGeom prst="rect">
             <a:avLst/>
@@ -6778,10 +6460,341 @@
       </p:pic>
       <p:pic>
         <p:nvPicPr>
-          <p:cNvPr id="1062" name="Picture 16">
-            <a:extLst>
-              <a:ext uri="{FF2B5EF4-FFF2-40B4-BE49-F238E27FC236}">
-                <a16:creationId xmlns:a16="http://schemas.microsoft.com/office/drawing/2014/main" id="{69EE2BF8-1936-3019-FC18-6D538D356424}"/>
+          <p:cNvPr id="42" name="Picture 4" descr="No description available.">
+            <a:extLst>
+              <a:ext uri="{FF2B5EF4-FFF2-40B4-BE49-F238E27FC236}">
+                <a16:creationId xmlns:a16="http://schemas.microsoft.com/office/drawing/2014/main" id="{C152D016-149F-D2E6-8C49-E84405B1DD6F}"/>
+              </a:ext>
+            </a:extLst>
+          </p:cNvPr>
+          <p:cNvPicPr>
+            <a:picLocks noChangeAspect="1" noChangeArrowheads="1"/>
+          </p:cNvPicPr>
+          <p:nvPr/>
+        </p:nvPicPr>
+        <p:blipFill>
+          <a:blip r:embed="rId17">
+            <a:extLst>
+              <a:ext uri="{28A0092B-C50C-407E-A947-70E740481C1C}">
+                <a14:useLocalDpi xmlns:a14="http://schemas.microsoft.com/office/drawing/2010/main" val="0"/>
+              </a:ext>
+            </a:extLst>
+          </a:blip>
+          <a:srcRect/>
+          <a:stretch>
+            <a:fillRect/>
+          </a:stretch>
+        </p:blipFill>
+        <p:spPr bwMode="auto">
+          <a:xfrm>
+            <a:off x="3093377" y="351649"/>
+            <a:ext cx="504000" cy="413931"/>
+          </a:xfrm>
+          <a:prstGeom prst="rect">
+            <a:avLst/>
+          </a:prstGeom>
+          <a:noFill/>
+          <a:extLst>
+            <a:ext uri="{909E8E84-426E-40DD-AFC4-6F175D3DCCD1}">
+              <a14:hiddenFill xmlns:a14="http://schemas.microsoft.com/office/drawing/2010/main">
+                <a:solidFill>
+                  <a:srgbClr val="FFFFFF"/>
+                </a:solidFill>
+              </a14:hiddenFill>
+            </a:ext>
+          </a:extLst>
+        </p:spPr>
+      </p:pic>
+      <p:sp>
+        <p:nvSpPr>
+          <p:cNvPr id="43" name="Rounded Rectangle 42">
+            <a:extLst>
+              <a:ext uri="{FF2B5EF4-FFF2-40B4-BE49-F238E27FC236}">
+                <a16:creationId xmlns:a16="http://schemas.microsoft.com/office/drawing/2014/main" id="{DD4F9CAD-2032-0C9A-39D4-84570919589B}"/>
+              </a:ext>
+            </a:extLst>
+          </p:cNvPr>
+          <p:cNvSpPr>
+            <a:spLocks/>
+          </p:cNvSpPr>
+          <p:nvPr/>
+        </p:nvSpPr>
+        <p:spPr>
+          <a:xfrm>
+            <a:off x="5196549" y="316308"/>
+            <a:ext cx="3990664" cy="490655"/>
+          </a:xfrm>
+          <a:prstGeom prst="roundRect">
+            <a:avLst>
+              <a:gd name="adj" fmla="val 42424"/>
+            </a:avLst>
+          </a:prstGeom>
+          <a:ln/>
+        </p:spPr>
+        <p:style>
+          <a:lnRef idx="2">
+            <a:schemeClr val="dk1"/>
+          </a:lnRef>
+          <a:fillRef idx="1">
+            <a:schemeClr val="lt1"/>
+          </a:fillRef>
+          <a:effectRef idx="0">
+            <a:schemeClr val="dk1"/>
+          </a:effectRef>
+          <a:fontRef idx="minor">
+            <a:schemeClr val="dk1"/>
+          </a:fontRef>
+        </p:style>
+        <p:txBody>
+          <a:bodyPr rtlCol="0" anchor="ctr"/>
+          <a:lstStyle/>
+          <a:p>
+            <a:pPr algn="ctr"/>
+            <a:endParaRPr lang="en-VN"/>
+          </a:p>
+        </p:txBody>
+      </p:sp>
+      <p:pic>
+        <p:nvPicPr>
+          <p:cNvPr id="44" name="Picture 4">
+            <a:extLst>
+              <a:ext uri="{FF2B5EF4-FFF2-40B4-BE49-F238E27FC236}">
+                <a16:creationId xmlns:a16="http://schemas.microsoft.com/office/drawing/2014/main" id="{95AA6FF5-7ED0-8B04-306F-154857BB72E1}"/>
+              </a:ext>
+            </a:extLst>
+          </p:cNvPr>
+          <p:cNvPicPr>
+            <a:picLocks noChangeAspect="1"/>
+          </p:cNvPicPr>
+          <p:nvPr/>
+        </p:nvPicPr>
+        <p:blipFill rotWithShape="1">
+          <a:blip r:embed="rId10">
+            <a:extLst>
+              <a:ext uri="{28A0092B-C50C-407E-A947-70E740481C1C}">
+                <a14:useLocalDpi xmlns:a14="http://schemas.microsoft.com/office/drawing/2010/main" val="0"/>
+              </a:ext>
+            </a:extLst>
+          </a:blip>
+          <a:srcRect t="22610"/>
+          <a:stretch>
+            <a:fillRect/>
+          </a:stretch>
+        </p:blipFill>
+        <p:spPr bwMode="auto">
+          <a:xfrm>
+            <a:off x="6319125" y="374506"/>
+            <a:ext cx="1138372" cy="432000"/>
+          </a:xfrm>
+          <a:prstGeom prst="rect">
+            <a:avLst/>
+          </a:prstGeom>
+          <a:noFill/>
+          <a:extLst>
+            <a:ext uri="{909E8E84-426E-40DD-AFC4-6F175D3DCCD1}">
+              <a14:hiddenFill xmlns:a14="http://schemas.microsoft.com/office/drawing/2010/main">
+                <a:solidFill>
+                  <a:srgbClr val="FFFFFF"/>
+                </a:solidFill>
+              </a14:hiddenFill>
+            </a:ext>
+          </a:extLst>
+        </p:spPr>
+      </p:pic>
+      <p:pic>
+        <p:nvPicPr>
+          <p:cNvPr id="45" name="Picture 6" descr="LOGO TRƯỜNG - Trường Đại học Phan Thiết">
+            <a:extLst>
+              <a:ext uri="{FF2B5EF4-FFF2-40B4-BE49-F238E27FC236}">
+                <a16:creationId xmlns:a16="http://schemas.microsoft.com/office/drawing/2014/main" id="{450C6EDA-59F7-F2A0-B33A-48675EEBD366}"/>
+              </a:ext>
+            </a:extLst>
+          </p:cNvPr>
+          <p:cNvPicPr>
+            <a:picLocks noChangeAspect="1"/>
+          </p:cNvPicPr>
+          <p:nvPr/>
+        </p:nvPicPr>
+        <p:blipFill>
+          <a:blip r:embed="rId11">
+            <a:extLst>
+              <a:ext uri="{28A0092B-C50C-407E-A947-70E740481C1C}">
+                <a14:useLocalDpi xmlns:a14="http://schemas.microsoft.com/office/drawing/2010/main" val="0"/>
+              </a:ext>
+            </a:extLst>
+          </a:blip>
+          <a:srcRect/>
+          <a:stretch>
+            <a:fillRect/>
+          </a:stretch>
+        </p:blipFill>
+        <p:spPr bwMode="auto">
+          <a:xfrm>
+            <a:off x="5265484" y="400030"/>
+            <a:ext cx="324000" cy="324000"/>
+          </a:xfrm>
+          <a:prstGeom prst="rect">
+            <a:avLst/>
+          </a:prstGeom>
+          <a:noFill/>
+          <a:extLst>
+            <a:ext uri="{909E8E84-426E-40DD-AFC4-6F175D3DCCD1}">
+              <a14:hiddenFill xmlns:a14="http://schemas.microsoft.com/office/drawing/2010/main">
+                <a:solidFill>
+                  <a:srgbClr val="FFFFFF"/>
+                </a:solidFill>
+              </a14:hiddenFill>
+            </a:ext>
+          </a:extLst>
+        </p:spPr>
+      </p:pic>
+      <p:pic>
+        <p:nvPicPr>
+          <p:cNvPr id="51" name="Picture 8" descr="Giới Thiệu Trường Đại Học Thương Mại - TMU">
+            <a:extLst>
+              <a:ext uri="{FF2B5EF4-FFF2-40B4-BE49-F238E27FC236}">
+                <a16:creationId xmlns:a16="http://schemas.microsoft.com/office/drawing/2014/main" id="{7C74FA34-1FE3-92D2-AA87-8ADF4AB64FC9}"/>
+              </a:ext>
+            </a:extLst>
+          </p:cNvPr>
+          <p:cNvPicPr>
+            <a:picLocks noChangeAspect="1"/>
+          </p:cNvPicPr>
+          <p:nvPr/>
+        </p:nvPicPr>
+        <p:blipFill>
+          <a:blip r:embed="rId12">
+            <a:extLst>
+              <a:ext uri="{28A0092B-C50C-407E-A947-70E740481C1C}">
+                <a14:useLocalDpi xmlns:a14="http://schemas.microsoft.com/office/drawing/2010/main" val="0"/>
+              </a:ext>
+            </a:extLst>
+          </a:blip>
+          <a:srcRect/>
+          <a:stretch>
+            <a:fillRect/>
+          </a:stretch>
+        </p:blipFill>
+        <p:spPr bwMode="auto">
+          <a:xfrm>
+            <a:off x="5593112" y="400029"/>
+            <a:ext cx="528973" cy="324000"/>
+          </a:xfrm>
+          <a:prstGeom prst="rect">
+            <a:avLst/>
+          </a:prstGeom>
+          <a:noFill/>
+          <a:extLst>
+            <a:ext uri="{909E8E84-426E-40DD-AFC4-6F175D3DCCD1}">
+              <a14:hiddenFill xmlns:a14="http://schemas.microsoft.com/office/drawing/2010/main">
+                <a:solidFill>
+                  <a:srgbClr val="FFFFFF"/>
+                </a:solidFill>
+              </a14:hiddenFill>
+            </a:ext>
+          </a:extLst>
+        </p:spPr>
+      </p:pic>
+      <p:pic>
+        <p:nvPicPr>
+          <p:cNvPr id="58" name="Picture 10" descr="Logo Phenikaa University - International Institute for Environmental Studies">
+            <a:extLst>
+              <a:ext uri="{FF2B5EF4-FFF2-40B4-BE49-F238E27FC236}">
+                <a16:creationId xmlns:a16="http://schemas.microsoft.com/office/drawing/2014/main" id="{262B85D5-C159-1B9D-5E9D-03A774340CE2}"/>
+              </a:ext>
+            </a:extLst>
+          </p:cNvPr>
+          <p:cNvPicPr>
+            <a:picLocks noChangeAspect="1"/>
+          </p:cNvPicPr>
+          <p:nvPr/>
+        </p:nvPicPr>
+        <p:blipFill>
+          <a:blip r:embed="rId13">
+            <a:extLst>
+              <a:ext uri="{28A0092B-C50C-407E-A947-70E740481C1C}">
+                <a14:useLocalDpi xmlns:a14="http://schemas.microsoft.com/office/drawing/2010/main" val="0"/>
+              </a:ext>
+            </a:extLst>
+          </a:blip>
+          <a:srcRect/>
+          <a:stretch>
+            <a:fillRect/>
+          </a:stretch>
+        </p:blipFill>
+        <p:spPr bwMode="auto">
+          <a:xfrm>
+            <a:off x="7414816" y="403216"/>
+            <a:ext cx="472064" cy="324000"/>
+          </a:xfrm>
+          <a:prstGeom prst="rect">
+            <a:avLst/>
+          </a:prstGeom>
+          <a:noFill/>
+          <a:extLst>
+            <a:ext uri="{909E8E84-426E-40DD-AFC4-6F175D3DCCD1}">
+              <a14:hiddenFill xmlns:a14="http://schemas.microsoft.com/office/drawing/2010/main">
+                <a:solidFill>
+                  <a:srgbClr val="FFFFFF"/>
+                </a:solidFill>
+              </a14:hiddenFill>
+            </a:ext>
+          </a:extLst>
+        </p:spPr>
+      </p:pic>
+      <p:pic>
+        <p:nvPicPr>
+          <p:cNvPr id="59" name="Picture 12" descr="About | Tohoku University">
+            <a:extLst>
+              <a:ext uri="{FF2B5EF4-FFF2-40B4-BE49-F238E27FC236}">
+                <a16:creationId xmlns:a16="http://schemas.microsoft.com/office/drawing/2014/main" id="{CAC9E764-64A0-5F37-201E-667C7AD70EB7}"/>
+              </a:ext>
+            </a:extLst>
+          </p:cNvPr>
+          <p:cNvPicPr>
+            <a:picLocks noChangeAspect="1"/>
+          </p:cNvPicPr>
+          <p:nvPr/>
+        </p:nvPicPr>
+        <p:blipFill>
+          <a:blip r:embed="rId14">
+            <a:extLst>
+              <a:ext uri="{28A0092B-C50C-407E-A947-70E740481C1C}">
+                <a14:useLocalDpi xmlns:a14="http://schemas.microsoft.com/office/drawing/2010/main" val="0"/>
+              </a:ext>
+            </a:extLst>
+          </a:blip>
+          <a:srcRect/>
+          <a:stretch>
+            <a:fillRect/>
+          </a:stretch>
+        </p:blipFill>
+        <p:spPr bwMode="auto">
+          <a:xfrm>
+            <a:off x="8853008" y="385016"/>
+            <a:ext cx="266208" cy="360000"/>
+          </a:xfrm>
+          <a:prstGeom prst="rect">
+            <a:avLst/>
+          </a:prstGeom>
+          <a:noFill/>
+          <a:extLst>
+            <a:ext uri="{909E8E84-426E-40DD-AFC4-6F175D3DCCD1}">
+              <a14:hiddenFill xmlns:a14="http://schemas.microsoft.com/office/drawing/2010/main">
+                <a:solidFill>
+                  <a:srgbClr val="FFFFFF"/>
+                </a:solidFill>
+              </a14:hiddenFill>
+            </a:ext>
+          </a:extLst>
+        </p:spPr>
+      </p:pic>
+      <p:pic>
+        <p:nvPicPr>
+          <p:cNvPr id="1025" name="Picture 1024">
+            <a:extLst>
+              <a:ext uri="{FF2B5EF4-FFF2-40B4-BE49-F238E27FC236}">
+                <a16:creationId xmlns:a16="http://schemas.microsoft.com/office/drawing/2014/main" id="{A0AF364C-26AF-1936-F068-7367F1D445CB}"/>
               </a:ext>
             </a:extLst>
           </p:cNvPr>
@@ -6791,22 +6804,116 @@
           <p:nvPr/>
         </p:nvPicPr>
         <p:blipFill rotWithShape="1">
-          <a:blip r:embed="rId14">
+          <a:blip r:embed="rId15">
             <a:extLst>
               <a:ext uri="{28A0092B-C50C-407E-A947-70E740481C1C}">
                 <a14:useLocalDpi xmlns:a14="http://schemas.microsoft.com/office/drawing/2010/main" val="0"/>
               </a:ext>
             </a:extLst>
           </a:blip>
-          <a:srcRect l="61227" t="79840" r="35513" b="13804"/>
+          <a:srcRect l="61575" t="79869" r="35762" b="14847"/>
           <a:stretch>
             <a:fillRect/>
           </a:stretch>
         </p:blipFill>
         <p:spPr bwMode="auto">
           <a:xfrm>
-            <a:off x="6361224" y="368083"/>
-            <a:ext cx="400115" cy="438970"/>
+            <a:off x="6122643" y="387165"/>
+            <a:ext cx="296328" cy="330743"/>
+          </a:xfrm>
+          <a:prstGeom prst="rect">
+            <a:avLst/>
+          </a:prstGeom>
+          <a:noFill/>
+          <a:extLst>
+            <a:ext uri="{909E8E84-426E-40DD-AFC4-6F175D3DCCD1}">
+              <a14:hiddenFill xmlns:a14="http://schemas.microsoft.com/office/drawing/2010/main">
+                <a:solidFill>
+                  <a:srgbClr val="FFFFFF"/>
+                </a:solidFill>
+              </a14:hiddenFill>
+            </a:ext>
+          </a:extLst>
+        </p:spPr>
+      </p:pic>
+      <p:pic>
+        <p:nvPicPr>
+          <p:cNvPr id="1026" name="Picture 2" descr="No description available.">
+            <a:extLst>
+              <a:ext uri="{FF2B5EF4-FFF2-40B4-BE49-F238E27FC236}">
+                <a16:creationId xmlns:a16="http://schemas.microsoft.com/office/drawing/2014/main" id="{D818843F-ECE5-F985-FA94-7AA149242EB5}"/>
+              </a:ext>
+            </a:extLst>
+          </p:cNvPr>
+          <p:cNvPicPr>
+            <a:picLocks noChangeAspect="1" noChangeArrowheads="1"/>
+          </p:cNvPicPr>
+          <p:nvPr/>
+        </p:nvPicPr>
+        <p:blipFill>
+          <a:blip r:embed="rId16">
+            <a:extLst>
+              <a:ext uri="{28A0092B-C50C-407E-A947-70E740481C1C}">
+                <a14:useLocalDpi xmlns:a14="http://schemas.microsoft.com/office/drawing/2010/main" val="0"/>
+              </a:ext>
+            </a:extLst>
+          </a:blip>
+          <a:srcRect/>
+          <a:stretch>
+            <a:fillRect/>
+          </a:stretch>
+        </p:blipFill>
+        <p:spPr bwMode="auto">
+          <a:xfrm>
+            <a:off x="8420557" y="374506"/>
+            <a:ext cx="373999" cy="360000"/>
+          </a:xfrm>
+          <a:prstGeom prst="rect">
+            <a:avLst/>
+          </a:prstGeom>
+          <a:noFill/>
+          <a:extLst>
+            <a:ext uri="{909E8E84-426E-40DD-AFC4-6F175D3DCCD1}">
+              <a14:hiddenFill xmlns:a14="http://schemas.microsoft.com/office/drawing/2010/main">
+                <a:solidFill>
+                  <a:srgbClr val="FFFFFF"/>
+                </a:solidFill>
+              </a14:hiddenFill>
+            </a:ext>
+          </a:extLst>
+        </p:spPr>
+      </p:pic>
+      <p:pic>
+        <p:nvPicPr>
+          <p:cNvPr id="1027" name="Picture 4" descr="No description available.">
+            <a:extLst>
+              <a:ext uri="{FF2B5EF4-FFF2-40B4-BE49-F238E27FC236}">
+                <a16:creationId xmlns:a16="http://schemas.microsoft.com/office/drawing/2014/main" id="{75DCF351-A182-7395-CD99-A2EC878760A1}"/>
+              </a:ext>
+            </a:extLst>
+          </p:cNvPr>
+          <p:cNvPicPr>
+            <a:picLocks noChangeAspect="1" noChangeArrowheads="1"/>
+          </p:cNvPicPr>
+          <p:nvPr/>
+        </p:nvPicPr>
+        <p:blipFill>
+          <a:blip r:embed="rId17">
+            <a:extLst>
+              <a:ext uri="{28A0092B-C50C-407E-A947-70E740481C1C}">
+                <a14:useLocalDpi xmlns:a14="http://schemas.microsoft.com/office/drawing/2010/main" val="0"/>
+              </a:ext>
+            </a:extLst>
+          </a:blip>
+          <a:srcRect/>
+          <a:stretch>
+            <a:fillRect/>
+          </a:stretch>
+        </p:blipFill>
+        <p:spPr bwMode="auto">
+          <a:xfrm>
+            <a:off x="7897776" y="352500"/>
+            <a:ext cx="504000" cy="413931"/>
           </a:xfrm>
           <a:prstGeom prst="rect">
             <a:avLst/>
@@ -6869,8 +6976,8 @@
         </p:nvSpPr>
         <p:spPr>
           <a:xfrm>
-            <a:off x="392151" y="315457"/>
-            <a:ext cx="3786198" cy="490655"/>
+            <a:off x="392150" y="315457"/>
+            <a:ext cx="3990664" cy="490655"/>
           </a:xfrm>
           <a:prstGeom prst="roundRect">
             <a:avLst>
@@ -6931,8 +7038,8 @@
         </p:blipFill>
         <p:spPr bwMode="auto">
           <a:xfrm>
-            <a:off x="1910143" y="360582"/>
-            <a:ext cx="1134505" cy="430534"/>
+            <a:off x="1514726" y="373655"/>
+            <a:ext cx="1138372" cy="432000"/>
           </a:xfrm>
           <a:prstGeom prst="rect">
             <a:avLst/>
@@ -6978,8 +7085,8 @@
         </p:blipFill>
         <p:spPr bwMode="auto">
           <a:xfrm>
-            <a:off x="431348" y="365981"/>
-            <a:ext cx="400115" cy="400115"/>
+            <a:off x="461085" y="399179"/>
+            <a:ext cx="324000" cy="324000"/>
           </a:xfrm>
           <a:prstGeom prst="rect">
             <a:avLst/>
@@ -7025,8 +7132,8 @@
         </p:blipFill>
         <p:spPr bwMode="auto">
           <a:xfrm>
-            <a:off x="882279" y="360726"/>
-            <a:ext cx="649073" cy="397561"/>
+            <a:off x="788713" y="399178"/>
+            <a:ext cx="528973" cy="324000"/>
           </a:xfrm>
           <a:prstGeom prst="rect">
             <a:avLst/>
@@ -7072,8 +7179,8 @@
         </p:blipFill>
         <p:spPr bwMode="auto">
           <a:xfrm>
-            <a:off x="3055057" y="348147"/>
-            <a:ext cx="608946" cy="417949"/>
+            <a:off x="2610417" y="402365"/>
+            <a:ext cx="472064" cy="324000"/>
           </a:xfrm>
           <a:prstGeom prst="rect">
             <a:avLst/>
@@ -7119,8 +7226,8 @@
         </p:blipFill>
         <p:spPr bwMode="auto">
           <a:xfrm>
-            <a:off x="3714205" y="360582"/>
-            <a:ext cx="302791" cy="409473"/>
+            <a:off x="4048609" y="384165"/>
+            <a:ext cx="266208" cy="360000"/>
           </a:xfrm>
           <a:prstGeom prst="rect">
             <a:avLst/>
@@ -7159,15 +7266,109 @@
               </a:ext>
             </a:extLst>
           </a:blip>
-          <a:srcRect l="61227" t="79869" r="35513" b="13804"/>
+          <a:srcRect l="61575" t="79869" r="35762" b="14847"/>
           <a:stretch>
             <a:fillRect/>
           </a:stretch>
         </p:blipFill>
         <p:spPr bwMode="auto">
           <a:xfrm>
-            <a:off x="1589614" y="341323"/>
-            <a:ext cx="400115" cy="436868"/>
+            <a:off x="1318244" y="386314"/>
+            <a:ext cx="296328" cy="330743"/>
+          </a:xfrm>
+          <a:prstGeom prst="rect">
+            <a:avLst/>
+          </a:prstGeom>
+          <a:noFill/>
+          <a:extLst>
+            <a:ext uri="{909E8E84-426E-40DD-AFC4-6F175D3DCCD1}">
+              <a14:hiddenFill xmlns:a14="http://schemas.microsoft.com/office/drawing/2010/main">
+                <a:solidFill>
+                  <a:srgbClr val="FFFFFF"/>
+                </a:solidFill>
+              </a14:hiddenFill>
+            </a:ext>
+          </a:extLst>
+        </p:spPr>
+      </p:pic>
+      <p:pic>
+        <p:nvPicPr>
+          <p:cNvPr id="1026" name="Picture 2" descr="No description available.">
+            <a:extLst>
+              <a:ext uri="{FF2B5EF4-FFF2-40B4-BE49-F238E27FC236}">
+                <a16:creationId xmlns:a16="http://schemas.microsoft.com/office/drawing/2014/main" id="{3BBB2C06-E9AB-AC7A-44B1-7043C6E05BD4}"/>
+              </a:ext>
+            </a:extLst>
+          </p:cNvPr>
+          <p:cNvPicPr>
+            <a:picLocks noChangeAspect="1" noChangeArrowheads="1"/>
+          </p:cNvPicPr>
+          <p:nvPr/>
+        </p:nvPicPr>
+        <p:blipFill>
+          <a:blip r:embed="rId8">
+            <a:extLst>
+              <a:ext uri="{28A0092B-C50C-407E-A947-70E740481C1C}">
+                <a14:useLocalDpi xmlns:a14="http://schemas.microsoft.com/office/drawing/2010/main" val="0"/>
+              </a:ext>
+            </a:extLst>
+          </a:blip>
+          <a:srcRect/>
+          <a:stretch>
+            <a:fillRect/>
+          </a:stretch>
+        </p:blipFill>
+        <p:spPr bwMode="auto">
+          <a:xfrm>
+            <a:off x="3616158" y="373655"/>
+            <a:ext cx="373999" cy="360000"/>
+          </a:xfrm>
+          <a:prstGeom prst="rect">
+            <a:avLst/>
+          </a:prstGeom>
+          <a:noFill/>
+          <a:extLst>
+            <a:ext uri="{909E8E84-426E-40DD-AFC4-6F175D3DCCD1}">
+              <a14:hiddenFill xmlns:a14="http://schemas.microsoft.com/office/drawing/2010/main">
+                <a:solidFill>
+                  <a:srgbClr val="FFFFFF"/>
+                </a:solidFill>
+              </a14:hiddenFill>
+            </a:ext>
+          </a:extLst>
+        </p:spPr>
+      </p:pic>
+      <p:pic>
+        <p:nvPicPr>
+          <p:cNvPr id="1028" name="Picture 4" descr="No description available.">
+            <a:extLst>
+              <a:ext uri="{FF2B5EF4-FFF2-40B4-BE49-F238E27FC236}">
+                <a16:creationId xmlns:a16="http://schemas.microsoft.com/office/drawing/2014/main" id="{3A2ED54E-79DB-E2D3-D7C6-49FA7DFC24FA}"/>
+              </a:ext>
+            </a:extLst>
+          </p:cNvPr>
+          <p:cNvPicPr>
+            <a:picLocks noChangeAspect="1" noChangeArrowheads="1"/>
+          </p:cNvPicPr>
+          <p:nvPr/>
+        </p:nvPicPr>
+        <p:blipFill>
+          <a:blip r:embed="rId9">
+            <a:extLst>
+              <a:ext uri="{28A0092B-C50C-407E-A947-70E740481C1C}">
+                <a14:useLocalDpi xmlns:a14="http://schemas.microsoft.com/office/drawing/2010/main" val="0"/>
+              </a:ext>
+            </a:extLst>
+          </a:blip>
+          <a:srcRect/>
+          <a:stretch>
+            <a:fillRect/>
+          </a:stretch>
+        </p:blipFill>
+        <p:spPr bwMode="auto">
+          <a:xfrm>
+            <a:off x="3093377" y="351649"/>
+            <a:ext cx="504000" cy="413931"/>
           </a:xfrm>
           <a:prstGeom prst="rect">
             <a:avLst/>
